--- a/btabok/niveau-1/deel-07/slidedeck.pptx
+++ b/btabok/niveau-1/deel-07/slidedeck.pptx
@@ -3887,41 +3887,40 @@
           </a:p>
         </p:txBody>
       </p:sp>
-      <p:sp>
-        <p:nvSpPr>
-          <p:cNvPr id="3" name="Shape 1"/>
-          <p:cNvSpPr/>
+      <p:pic>
+        <p:nvPicPr>
+          <p:cNvPr id="3" name="Image 0" descr="C:\Projecten\eductus-trainingen\BTABOK\figuren\figuur-7-2.png">    </p:cNvPr>
+          <p:cNvPicPr>
+            <a:picLocks noChangeAspect="1"/>
+          </p:cNvPicPr>
           <p:nvPr/>
-        </p:nvSpPr>
+        </p:nvPicPr>
+        <p:blipFill>
+          <a:blip r:embed="rId1"/>
+          <a:stretch>
+            <a:fillRect/>
+          </a:stretch>
+        </p:blipFill>
         <p:spPr>
           <a:xfrm>
-            <a:off x="1371600" y="1280160"/>
-            <a:ext cx="9418320" cy="4389120"/>
+            <a:off x="2961345" y="1234440"/>
+            <a:ext cx="6238830" cy="4160520"/>
           </a:xfrm>
           <a:prstGeom prst="rect">
             <a:avLst/>
           </a:prstGeom>
-          <a:solidFill>
-            <a:srgbClr val="F4F2EC"/>
-          </a:solidFill>
-          <a:ln w="12700">
-            <a:solidFill>
-              <a:srgbClr val="DFDCD3"/>
-            </a:solidFill>
-            <a:prstDash val="dash"/>
-          </a:ln>
         </p:spPr>
-      </p:sp>
-      <p:sp>
-        <p:nvSpPr>
-          <p:cNvPr id="4" name="Text 2"/>
+      </p:pic>
+      <p:sp>
+        <p:nvSpPr>
+          <p:cNvPr id="4" name="Text 1"/>
           <p:cNvSpPr/>
           <p:nvPr/>
         </p:nvSpPr>
         <p:spPr>
           <a:xfrm>
-            <a:off x="1554480" y="1280160"/>
-            <a:ext cx="9052560" cy="4389120"/>
+            <a:off x="822960" y="5486400"/>
+            <a:ext cx="10515600" cy="457200"/>
           </a:xfrm>
           <a:prstGeom prst="rect">
             <a:avLst/>
@@ -3937,25 +3936,7 @@
               <a:buNone/>
             </a:pPr>
             <a:r>
-              <a:rPr lang="en-US" sz="1600" i="1" dirty="0">
-                <a:solidFill>
-                  <a:srgbClr val="14213D"/>
-                </a:solidFill>
-                <a:latin typeface="DM Sans" pitchFamily="34" charset="0"/>
-                <a:ea typeface="DM Sans" pitchFamily="34" charset="-122"/>
-                <a:cs typeface="DM Sans" pitchFamily="34" charset="-120"/>
-              </a:rPr>
-              <a:t>Figuur 7-2 — bestuurlijk, functioneel, technisch, met wat wél en niet is opgenomen
-</a:t>
-            </a:r>
-            <a:endParaRPr lang="en-US" sz="1600" dirty="0"/>
-          </a:p>
-          <a:p>
-            <a:pPr algn="ctr" indent="0" marL="0">
-              <a:buNone/>
-            </a:pPr>
-            <a:r>
-              <a:rPr lang="en-US" sz="1200" i="1" dirty="0">
+              <a:rPr lang="en-US" sz="1300" i="1" dirty="0">
                 <a:solidFill>
                   <a:srgbClr val="55606F"/>
                 </a:solidFill>
@@ -3963,9 +3944,9 @@
                 <a:ea typeface="DM Sans" pitchFamily="34" charset="-122"/>
                 <a:cs typeface="DM Sans" pitchFamily="34" charset="-120"/>
               </a:rPr>
-              <a:t>wordt toegevoegd bij de interactieve versie</a:t>
-            </a:r>
-            <a:endParaRPr lang="en-US" sz="1600" dirty="0"/>
+              <a:t>Figuur 7-2 — bestuurlijk, functioneel, technisch, met wat wél en niet is opgenomen</a:t>
+            </a:r>
+            <a:endParaRPr lang="en-US" sz="1300" dirty="0"/>
           </a:p>
         </p:txBody>
       </p:sp>
@@ -5340,41 +5321,40 @@
           </a:p>
         </p:txBody>
       </p:sp>
-      <p:sp>
-        <p:nvSpPr>
-          <p:cNvPr id="3" name="Shape 1"/>
-          <p:cNvSpPr/>
+      <p:pic>
+        <p:nvPicPr>
+          <p:cNvPr id="3" name="Image 0" descr="C:\Projecten\eductus-trainingen\BTABOK\figuren\figuur-7-3.png">    </p:cNvPr>
+          <p:cNvPicPr>
+            <a:picLocks noChangeAspect="1"/>
+          </p:cNvPicPr>
           <p:nvPr/>
-        </p:nvSpPr>
+        </p:nvPicPr>
+        <p:blipFill>
+          <a:blip r:embed="rId1"/>
+          <a:stretch>
+            <a:fillRect/>
+          </a:stretch>
+        </p:blipFill>
         <p:spPr>
           <a:xfrm>
-            <a:off x="1371600" y="1280160"/>
-            <a:ext cx="9418320" cy="4389120"/>
+            <a:off x="2961345" y="1234440"/>
+            <a:ext cx="6238830" cy="4160520"/>
           </a:xfrm>
           <a:prstGeom prst="rect">
             <a:avLst/>
           </a:prstGeom>
-          <a:solidFill>
-            <a:srgbClr val="F4F2EC"/>
-          </a:solidFill>
-          <a:ln w="12700">
-            <a:solidFill>
-              <a:srgbClr val="DFDCD3"/>
-            </a:solidFill>
-            <a:prstDash val="dash"/>
-          </a:ln>
         </p:spPr>
-      </p:sp>
-      <p:sp>
-        <p:nvSpPr>
-          <p:cNvPr id="4" name="Text 2"/>
+      </p:pic>
+      <p:sp>
+        <p:nvSpPr>
+          <p:cNvPr id="4" name="Text 1"/>
           <p:cNvSpPr/>
           <p:nvPr/>
         </p:nvSpPr>
         <p:spPr>
           <a:xfrm>
-            <a:off x="1554480" y="1280160"/>
-            <a:ext cx="9052560" cy="4389120"/>
+            <a:off x="822960" y="5486400"/>
+            <a:ext cx="10515600" cy="457200"/>
           </a:xfrm>
           <a:prstGeom prst="rect">
             <a:avLst/>
@@ -5390,25 +5370,7 @@
               <a:buNone/>
             </a:pPr>
             <a:r>
-              <a:rPr lang="en-US" sz="1600" i="1" dirty="0">
-                <a:solidFill>
-                  <a:srgbClr val="14213D"/>
-                </a:solidFill>
-                <a:latin typeface="DM Sans" pitchFamily="34" charset="0"/>
-                <a:ea typeface="DM Sans" pitchFamily="34" charset="-122"/>
-                <a:cs typeface="DM Sans" pitchFamily="34" charset="-120"/>
-              </a:rPr>
-              <a:t>Figuur 7-3 — context, alternatieven, besluit, motivering, heroverwegingsmoment
-</a:t>
-            </a:r>
-            <a:endParaRPr lang="en-US" sz="1600" dirty="0"/>
-          </a:p>
-          <a:p>
-            <a:pPr algn="ctr" indent="0" marL="0">
-              <a:buNone/>
-            </a:pPr>
-            <a:r>
-              <a:rPr lang="en-US" sz="1200" i="1" dirty="0">
+              <a:rPr lang="en-US" sz="1300" i="1" dirty="0">
                 <a:solidFill>
                   <a:srgbClr val="55606F"/>
                 </a:solidFill>
@@ -5416,9 +5378,9 @@
                 <a:ea typeface="DM Sans" pitchFamily="34" charset="-122"/>
                 <a:cs typeface="DM Sans" pitchFamily="34" charset="-120"/>
               </a:rPr>
-              <a:t>wordt toegevoegd bij de interactieve versie</a:t>
-            </a:r>
-            <a:endParaRPr lang="en-US" sz="1600" dirty="0"/>
+              <a:t>Figuur 7-3 — context, alternatieven, besluit, motivering, heroverwegingsmoment</a:t>
+            </a:r>
+            <a:endParaRPr lang="en-US" sz="1300" dirty="0"/>
           </a:p>
         </p:txBody>
       </p:sp>
@@ -6196,41 +6158,40 @@
           </a:p>
         </p:txBody>
       </p:sp>
-      <p:sp>
-        <p:nvSpPr>
-          <p:cNvPr id="3" name="Shape 1"/>
-          <p:cNvSpPr/>
+      <p:pic>
+        <p:nvPicPr>
+          <p:cNvPr id="3" name="Image 0" descr="C:\Projecten\eductus-trainingen\BTABOK\figuren\figuur-7-4.png">    </p:cNvPr>
+          <p:cNvPicPr>
+            <a:picLocks noChangeAspect="1"/>
+          </p:cNvPicPr>
           <p:nvPr/>
-        </p:nvSpPr>
+        </p:nvPicPr>
+        <p:blipFill>
+          <a:blip r:embed="rId1"/>
+          <a:stretch>
+            <a:fillRect/>
+          </a:stretch>
+        </p:blipFill>
         <p:spPr>
           <a:xfrm>
-            <a:off x="1371600" y="1280160"/>
-            <a:ext cx="9418320" cy="4389120"/>
+            <a:off x="2961345" y="1234440"/>
+            <a:ext cx="6238830" cy="4160520"/>
           </a:xfrm>
           <a:prstGeom prst="rect">
             <a:avLst/>
           </a:prstGeom>
-          <a:solidFill>
-            <a:srgbClr val="F4F2EC"/>
-          </a:solidFill>
-          <a:ln w="12700">
-            <a:solidFill>
-              <a:srgbClr val="DFDCD3"/>
-            </a:solidFill>
-            <a:prstDash val="dash"/>
-          </a:ln>
         </p:spPr>
-      </p:sp>
-      <p:sp>
-        <p:nvSpPr>
-          <p:cNvPr id="4" name="Text 2"/>
+      </p:pic>
+      <p:sp>
+        <p:nvSpPr>
+          <p:cNvPr id="4" name="Text 1"/>
           <p:cNvSpPr/>
           <p:nvPr/>
         </p:nvSpPr>
         <p:spPr>
           <a:xfrm>
-            <a:off x="1554480" y="1280160"/>
-            <a:ext cx="9052560" cy="4389120"/>
+            <a:off x="822960" y="5486400"/>
+            <a:ext cx="10515600" cy="457200"/>
           </a:xfrm>
           <a:prstGeom prst="rect">
             <a:avLst/>
@@ -6246,25 +6207,7 @@
               <a:buNone/>
             </a:pPr>
             <a:r>
-              <a:rPr lang="en-US" sz="1600" i="1" dirty="0">
-                <a:solidFill>
-                  <a:srgbClr val="14213D"/>
-                </a:solidFill>
-                <a:latin typeface="DM Sans" pitchFamily="34" charset="0"/>
-                <a:ea typeface="DM Sans" pitchFamily="34" charset="-122"/>
-                <a:cs typeface="DM Sans" pitchFamily="34" charset="-120"/>
-              </a:rPr>
-              <a:t>Figuur 7-4 — requirement → alternatieven → besluit → oplevering
-</a:t>
-            </a:r>
-            <a:endParaRPr lang="en-US" sz="1600" dirty="0"/>
-          </a:p>
-          <a:p>
-            <a:pPr algn="ctr" indent="0" marL="0">
-              <a:buNone/>
-            </a:pPr>
-            <a:r>
-              <a:rPr lang="en-US" sz="1200" i="1" dirty="0">
+              <a:rPr lang="en-US" sz="1300" i="1" dirty="0">
                 <a:solidFill>
                   <a:srgbClr val="55606F"/>
                 </a:solidFill>
@@ -6272,9 +6215,9 @@
                 <a:ea typeface="DM Sans" pitchFamily="34" charset="-122"/>
                 <a:cs typeface="DM Sans" pitchFamily="34" charset="-120"/>
               </a:rPr>
-              <a:t>wordt toegevoegd bij de interactieve versie</a:t>
-            </a:r>
-            <a:endParaRPr lang="en-US" sz="1600" dirty="0"/>
+              <a:t>Figuur 7-4 — requirement → alternatieven → besluit → oplevering</a:t>
+            </a:r>
+            <a:endParaRPr lang="en-US" sz="1300" dirty="0"/>
           </a:p>
         </p:txBody>
       </p:sp>
@@ -7639,41 +7582,40 @@
           </a:p>
         </p:txBody>
       </p:sp>
-      <p:sp>
-        <p:nvSpPr>
-          <p:cNvPr id="3" name="Shape 1"/>
-          <p:cNvSpPr/>
+      <p:pic>
+        <p:nvPicPr>
+          <p:cNvPr id="3" name="Image 0" descr="C:\Projecten\eductus-trainingen\BTABOK\figuren\figuur-7-1.png">    </p:cNvPr>
+          <p:cNvPicPr>
+            <a:picLocks noChangeAspect="1"/>
+          </p:cNvPicPr>
           <p:nvPr/>
-        </p:nvSpPr>
+        </p:nvPicPr>
+        <p:blipFill>
+          <a:blip r:embed="rId1"/>
+          <a:stretch>
+            <a:fillRect/>
+          </a:stretch>
+        </p:blipFill>
         <p:spPr>
           <a:xfrm>
-            <a:off x="1371600" y="1280160"/>
-            <a:ext cx="9418320" cy="4389120"/>
+            <a:off x="2961345" y="1234440"/>
+            <a:ext cx="6238830" cy="4160520"/>
           </a:xfrm>
           <a:prstGeom prst="rect">
             <a:avLst/>
           </a:prstGeom>
-          <a:solidFill>
-            <a:srgbClr val="F4F2EC"/>
-          </a:solidFill>
-          <a:ln w="12700">
-            <a:solidFill>
-              <a:srgbClr val="DFDCD3"/>
-            </a:solidFill>
-            <a:prstDash val="dash"/>
-          </a:ln>
         </p:spPr>
-      </p:sp>
-      <p:sp>
-        <p:nvSpPr>
-          <p:cNvPr id="4" name="Text 2"/>
+      </p:pic>
+      <p:sp>
+        <p:nvSpPr>
+          <p:cNvPr id="4" name="Text 1"/>
           <p:cNvSpPr/>
           <p:nvPr/>
         </p:nvSpPr>
         <p:spPr>
           <a:xfrm>
-            <a:off x="1554480" y="1280160"/>
-            <a:ext cx="9052560" cy="4389120"/>
+            <a:off x="822960" y="5486400"/>
+            <a:ext cx="10515600" cy="457200"/>
           </a:xfrm>
           <a:prstGeom prst="rect">
             <a:avLst/>
@@ -7689,25 +7631,7 @@
               <a:buNone/>
             </a:pPr>
             <a:r>
-              <a:rPr lang="en-US" sz="1600" i="1" dirty="0">
-                <a:solidFill>
-                  <a:srgbClr val="14213D"/>
-                </a:solidFill>
-                <a:latin typeface="DM Sans" pitchFamily="34" charset="0"/>
-                <a:ea typeface="DM Sans" pitchFamily="34" charset="-122"/>
-                <a:cs typeface="DM Sans" pitchFamily="34" charset="-120"/>
-              </a:rPr>
-              <a:t>Figuur 7-1 — het besluit, de vertrokken medewerkers, het gebrek aan spoor
-</a:t>
-            </a:r>
-            <a:endParaRPr lang="en-US" sz="1600" dirty="0"/>
-          </a:p>
-          <a:p>
-            <a:pPr algn="ctr" indent="0" marL="0">
-              <a:buNone/>
-            </a:pPr>
-            <a:r>
-              <a:rPr lang="en-US" sz="1200" i="1" dirty="0">
+              <a:rPr lang="en-US" sz="1300" i="1" dirty="0">
                 <a:solidFill>
                   <a:srgbClr val="55606F"/>
                 </a:solidFill>
@@ -7715,9 +7639,9 @@
                 <a:ea typeface="DM Sans" pitchFamily="34" charset="-122"/>
                 <a:cs typeface="DM Sans" pitchFamily="34" charset="-120"/>
               </a:rPr>
-              <a:t>wordt toegevoegd bij de interactieve versie</a:t>
-            </a:r>
-            <a:endParaRPr lang="en-US" sz="1600" dirty="0"/>
+              <a:t>Figuur 7-1 — het besluit, de vertrokken medewerkers, het gebrek aan spoor</a:t>
+            </a:r>
+            <a:endParaRPr lang="en-US" sz="1300" dirty="0"/>
           </a:p>
         </p:txBody>
       </p:sp>
